--- a/catalog/editorial/templates/ed_steps_vertical_6.pptx
+++ b/catalog/editorial/templates/ed_steps_vertical_6.pptx
@@ -3577,7 +3577,7 @@
           <a:noFill/>
         </p:spPr>
         <p:txBody>
-          <a:bodyPr wrap="square" lIns="18288" rIns="18288" tIns="13716" bIns="13716">
+          <a:bodyPr wrap="square" anchor="t" lIns="18288" rIns="18288" tIns="13716" bIns="13716">
             <a:noAutofit/>
           </a:bodyPr>
           <a:lstStyle/>
@@ -3632,7 +3632,7 @@
           <a:noFill/>
         </p:spPr>
         <p:txBody>
-          <a:bodyPr wrap="square" lIns="18288" rIns="18288" tIns="13716" bIns="13716">
+          <a:bodyPr wrap="square" anchor="t" lIns="18288" rIns="18288" tIns="13716" bIns="13716">
             <a:noAutofit/>
           </a:bodyPr>
           <a:lstStyle/>
@@ -3687,7 +3687,7 @@
           <a:noFill/>
         </p:spPr>
         <p:txBody>
-          <a:bodyPr wrap="square" lIns="18288" rIns="18288" tIns="13716" bIns="13716">
+          <a:bodyPr wrap="square" anchor="t" lIns="18288" rIns="18288" tIns="13716" bIns="13716">
             <a:noAutofit/>
           </a:bodyPr>
           <a:lstStyle/>
@@ -3786,7 +3786,7 @@
           <a:noFill/>
         </p:spPr>
         <p:txBody>
-          <a:bodyPr wrap="square" lIns="18288" rIns="18288" tIns="13716" bIns="13716">
+          <a:bodyPr wrap="square" anchor="t" lIns="18288" rIns="18288" tIns="13716" bIns="13716">
             <a:noAutofit/>
           </a:bodyPr>
           <a:lstStyle/>
@@ -3841,7 +3841,7 @@
           <a:noFill/>
         </p:spPr>
         <p:txBody>
-          <a:bodyPr wrap="square" lIns="18288" rIns="18288" tIns="13716" bIns="13716">
+          <a:bodyPr wrap="square" anchor="t" lIns="18288" rIns="18288" tIns="13716" bIns="13716">
             <a:noAutofit/>
           </a:bodyPr>
           <a:lstStyle/>
@@ -3976,7 +3976,7 @@
         <p:spPr>
           <a:xfrm>
             <a:off x="1234440" y="2167127"/>
-            <a:ext cx="411480" cy="365760"/>
+            <a:ext cx="411480" cy="592836"/>
           </a:xfrm>
           <a:prstGeom prst="rect">
             <a:avLst/>
@@ -3984,7 +3984,7 @@
           <a:noFill/>
         </p:spPr>
         <p:txBody>
-          <a:bodyPr wrap="square" lIns="18288" rIns="18288" tIns="13716" bIns="13716">
+          <a:bodyPr wrap="square" anchor="ctr" lIns="18288" rIns="18288" tIns="13716" bIns="13716">
             <a:noAutofit/>
           </a:bodyPr>
           <a:lstStyle/>
@@ -4030,8 +4030,8 @@
         </p:nvSpPr>
         <p:spPr>
           <a:xfrm>
-            <a:off x="1755648" y="2157984"/>
-            <a:ext cx="2542032" cy="620268"/>
+            <a:off x="1755648" y="2167127"/>
+            <a:ext cx="2542032" cy="592836"/>
           </a:xfrm>
           <a:prstGeom prst="rect">
             <a:avLst/>
@@ -4039,7 +4039,7 @@
           <a:noFill/>
         </p:spPr>
         <p:txBody>
-          <a:bodyPr wrap="square" lIns="18288" rIns="18288" tIns="13716" bIns="13716">
+          <a:bodyPr wrap="square" anchor="ctr" lIns="18288" rIns="18288" tIns="13716" bIns="13716">
             <a:noAutofit/>
           </a:bodyPr>
           <a:lstStyle/>
@@ -4085,8 +4085,8 @@
         </p:nvSpPr>
         <p:spPr>
           <a:xfrm>
-            <a:off x="4507992" y="2157984"/>
-            <a:ext cx="7013448" cy="620268"/>
+            <a:off x="4507992" y="2167127"/>
+            <a:ext cx="7013448" cy="592836"/>
           </a:xfrm>
           <a:prstGeom prst="rect">
             <a:avLst/>
@@ -4094,7 +4094,7 @@
           <a:noFill/>
         </p:spPr>
         <p:txBody>
-          <a:bodyPr wrap="square" lIns="18288" rIns="18288" tIns="13716" bIns="13716">
+          <a:bodyPr wrap="square" anchor="ctr" lIns="18288" rIns="18288" tIns="13716" bIns="13716">
             <a:noAutofit/>
           </a:bodyPr>
           <a:lstStyle/>
@@ -4185,7 +4185,7 @@
         <p:spPr>
           <a:xfrm>
             <a:off x="1234440" y="2814828"/>
-            <a:ext cx="411480" cy="365760"/>
+            <a:ext cx="411480" cy="592836"/>
           </a:xfrm>
           <a:prstGeom prst="rect">
             <a:avLst/>
@@ -4193,7 +4193,7 @@
           <a:noFill/>
         </p:spPr>
         <p:txBody>
-          <a:bodyPr wrap="square" lIns="18288" rIns="18288" tIns="13716" bIns="13716">
+          <a:bodyPr wrap="square" anchor="ctr" lIns="18288" rIns="18288" tIns="13716" bIns="13716">
             <a:noAutofit/>
           </a:bodyPr>
           <a:lstStyle/>
@@ -4239,8 +4239,8 @@
         </p:nvSpPr>
         <p:spPr>
           <a:xfrm>
-            <a:off x="1755648" y="2805684"/>
-            <a:ext cx="2542032" cy="620268"/>
+            <a:off x="1755648" y="2814828"/>
+            <a:ext cx="2542032" cy="592836"/>
           </a:xfrm>
           <a:prstGeom prst="rect">
             <a:avLst/>
@@ -4248,7 +4248,7 @@
           <a:noFill/>
         </p:spPr>
         <p:txBody>
-          <a:bodyPr wrap="square" lIns="18288" rIns="18288" tIns="13716" bIns="13716">
+          <a:bodyPr wrap="square" anchor="ctr" lIns="18288" rIns="18288" tIns="13716" bIns="13716">
             <a:noAutofit/>
           </a:bodyPr>
           <a:lstStyle/>
@@ -4294,8 +4294,8 @@
         </p:nvSpPr>
         <p:spPr>
           <a:xfrm>
-            <a:off x="4507992" y="2805684"/>
-            <a:ext cx="7013448" cy="620268"/>
+            <a:off x="4507992" y="2814828"/>
+            <a:ext cx="7013448" cy="592836"/>
           </a:xfrm>
           <a:prstGeom prst="rect">
             <a:avLst/>
@@ -4303,7 +4303,7 @@
           <a:noFill/>
         </p:spPr>
         <p:txBody>
-          <a:bodyPr wrap="square" lIns="18288" rIns="18288" tIns="13716" bIns="13716">
+          <a:bodyPr wrap="square" anchor="ctr" lIns="18288" rIns="18288" tIns="13716" bIns="13716">
             <a:noAutofit/>
           </a:bodyPr>
           <a:lstStyle/>
@@ -4394,7 +4394,7 @@
         <p:spPr>
           <a:xfrm>
             <a:off x="1234440" y="3462528"/>
-            <a:ext cx="411480" cy="365760"/>
+            <a:ext cx="411480" cy="592836"/>
           </a:xfrm>
           <a:prstGeom prst="rect">
             <a:avLst/>
@@ -4402,7 +4402,7 @@
           <a:noFill/>
         </p:spPr>
         <p:txBody>
-          <a:bodyPr wrap="square" lIns="18288" rIns="18288" tIns="13716" bIns="13716">
+          <a:bodyPr wrap="square" anchor="ctr" lIns="18288" rIns="18288" tIns="13716" bIns="13716">
             <a:noAutofit/>
           </a:bodyPr>
           <a:lstStyle/>
@@ -4448,8 +4448,8 @@
         </p:nvSpPr>
         <p:spPr>
           <a:xfrm>
-            <a:off x="1755648" y="3453384"/>
-            <a:ext cx="2542032" cy="620268"/>
+            <a:off x="1755648" y="3462528"/>
+            <a:ext cx="2542032" cy="592836"/>
           </a:xfrm>
           <a:prstGeom prst="rect">
             <a:avLst/>
@@ -4457,7 +4457,7 @@
           <a:noFill/>
         </p:spPr>
         <p:txBody>
-          <a:bodyPr wrap="square" lIns="18288" rIns="18288" tIns="13716" bIns="13716">
+          <a:bodyPr wrap="square" anchor="ctr" lIns="18288" rIns="18288" tIns="13716" bIns="13716">
             <a:noAutofit/>
           </a:bodyPr>
           <a:lstStyle/>
@@ -4503,8 +4503,8 @@
         </p:nvSpPr>
         <p:spPr>
           <a:xfrm>
-            <a:off x="4507992" y="3453384"/>
-            <a:ext cx="7013448" cy="620268"/>
+            <a:off x="4507992" y="3462528"/>
+            <a:ext cx="7013448" cy="592836"/>
           </a:xfrm>
           <a:prstGeom prst="rect">
             <a:avLst/>
@@ -4512,7 +4512,7 @@
           <a:noFill/>
         </p:spPr>
         <p:txBody>
-          <a:bodyPr wrap="square" lIns="18288" rIns="18288" tIns="13716" bIns="13716">
+          <a:bodyPr wrap="square" anchor="ctr" lIns="18288" rIns="18288" tIns="13716" bIns="13716">
             <a:noAutofit/>
           </a:bodyPr>
           <a:lstStyle/>
@@ -4603,7 +4603,7 @@
         <p:spPr>
           <a:xfrm>
             <a:off x="1234440" y="4110228"/>
-            <a:ext cx="411480" cy="365760"/>
+            <a:ext cx="411480" cy="592836"/>
           </a:xfrm>
           <a:prstGeom prst="rect">
             <a:avLst/>
@@ -4611,7 +4611,7 @@
           <a:noFill/>
         </p:spPr>
         <p:txBody>
-          <a:bodyPr wrap="square" lIns="18288" rIns="18288" tIns="13716" bIns="13716">
+          <a:bodyPr wrap="square" anchor="ctr" lIns="18288" rIns="18288" tIns="13716" bIns="13716">
             <a:noAutofit/>
           </a:bodyPr>
           <a:lstStyle/>
@@ -4657,8 +4657,8 @@
         </p:nvSpPr>
         <p:spPr>
           <a:xfrm>
-            <a:off x="1755648" y="4101083"/>
-            <a:ext cx="2542032" cy="620268"/>
+            <a:off x="1755648" y="4110228"/>
+            <a:ext cx="2542032" cy="592836"/>
           </a:xfrm>
           <a:prstGeom prst="rect">
             <a:avLst/>
@@ -4666,7 +4666,7 @@
           <a:noFill/>
         </p:spPr>
         <p:txBody>
-          <a:bodyPr wrap="square" lIns="18288" rIns="18288" tIns="13716" bIns="13716">
+          <a:bodyPr wrap="square" anchor="ctr" lIns="18288" rIns="18288" tIns="13716" bIns="13716">
             <a:noAutofit/>
           </a:bodyPr>
           <a:lstStyle/>
@@ -4712,8 +4712,8 @@
         </p:nvSpPr>
         <p:spPr>
           <a:xfrm>
-            <a:off x="4507992" y="4101083"/>
-            <a:ext cx="7013448" cy="620268"/>
+            <a:off x="4507992" y="4110228"/>
+            <a:ext cx="7013448" cy="592836"/>
           </a:xfrm>
           <a:prstGeom prst="rect">
             <a:avLst/>
@@ -4721,7 +4721,7 @@
           <a:noFill/>
         </p:spPr>
         <p:txBody>
-          <a:bodyPr wrap="square" lIns="18288" rIns="18288" tIns="13716" bIns="13716">
+          <a:bodyPr wrap="square" anchor="ctr" lIns="18288" rIns="18288" tIns="13716" bIns="13716">
             <a:noAutofit/>
           </a:bodyPr>
           <a:lstStyle/>
@@ -4812,7 +4812,7 @@
         <p:spPr>
           <a:xfrm>
             <a:off x="1234440" y="4757928"/>
-            <a:ext cx="411480" cy="365760"/>
+            <a:ext cx="411480" cy="592836"/>
           </a:xfrm>
           <a:prstGeom prst="rect">
             <a:avLst/>
@@ -4820,7 +4820,7 @@
           <a:noFill/>
         </p:spPr>
         <p:txBody>
-          <a:bodyPr wrap="square" lIns="18288" rIns="18288" tIns="13716" bIns="13716">
+          <a:bodyPr wrap="square" anchor="ctr" lIns="18288" rIns="18288" tIns="13716" bIns="13716">
             <a:noAutofit/>
           </a:bodyPr>
           <a:lstStyle/>
@@ -4866,8 +4866,8 @@
         </p:nvSpPr>
         <p:spPr>
           <a:xfrm>
-            <a:off x="1755648" y="4748784"/>
-            <a:ext cx="2542032" cy="620268"/>
+            <a:off x="1755648" y="4757928"/>
+            <a:ext cx="2542032" cy="592836"/>
           </a:xfrm>
           <a:prstGeom prst="rect">
             <a:avLst/>
@@ -4875,7 +4875,7 @@
           <a:noFill/>
         </p:spPr>
         <p:txBody>
-          <a:bodyPr wrap="square" lIns="18288" rIns="18288" tIns="13716" bIns="13716">
+          <a:bodyPr wrap="square" anchor="ctr" lIns="18288" rIns="18288" tIns="13716" bIns="13716">
             <a:noAutofit/>
           </a:bodyPr>
           <a:lstStyle/>
@@ -4921,8 +4921,8 @@
         </p:nvSpPr>
         <p:spPr>
           <a:xfrm>
-            <a:off x="4507992" y="4748784"/>
-            <a:ext cx="7013448" cy="620268"/>
+            <a:off x="4507992" y="4757928"/>
+            <a:ext cx="7013448" cy="592836"/>
           </a:xfrm>
           <a:prstGeom prst="rect">
             <a:avLst/>
@@ -4930,7 +4930,7 @@
           <a:noFill/>
         </p:spPr>
         <p:txBody>
-          <a:bodyPr wrap="square" lIns="18288" rIns="18288" tIns="13716" bIns="13716">
+          <a:bodyPr wrap="square" anchor="ctr" lIns="18288" rIns="18288" tIns="13716" bIns="13716">
             <a:noAutofit/>
           </a:bodyPr>
           <a:lstStyle/>
@@ -5021,7 +5021,7 @@
         <p:spPr>
           <a:xfrm>
             <a:off x="1234440" y="5405628"/>
-            <a:ext cx="411480" cy="365760"/>
+            <a:ext cx="411480" cy="592836"/>
           </a:xfrm>
           <a:prstGeom prst="rect">
             <a:avLst/>
@@ -5029,7 +5029,7 @@
           <a:noFill/>
         </p:spPr>
         <p:txBody>
-          <a:bodyPr wrap="square" lIns="18288" rIns="18288" tIns="13716" bIns="13716">
+          <a:bodyPr wrap="square" anchor="ctr" lIns="18288" rIns="18288" tIns="13716" bIns="13716">
             <a:noAutofit/>
           </a:bodyPr>
           <a:lstStyle/>
@@ -5075,8 +5075,8 @@
         </p:nvSpPr>
         <p:spPr>
           <a:xfrm>
-            <a:off x="1755648" y="5396484"/>
-            <a:ext cx="2542032" cy="620268"/>
+            <a:off x="1755648" y="5405628"/>
+            <a:ext cx="2542032" cy="592836"/>
           </a:xfrm>
           <a:prstGeom prst="rect">
             <a:avLst/>
@@ -5084,7 +5084,7 @@
           <a:noFill/>
         </p:spPr>
         <p:txBody>
-          <a:bodyPr wrap="square" lIns="18288" rIns="18288" tIns="13716" bIns="13716">
+          <a:bodyPr wrap="square" anchor="ctr" lIns="18288" rIns="18288" tIns="13716" bIns="13716">
             <a:noAutofit/>
           </a:bodyPr>
           <a:lstStyle/>
@@ -5130,8 +5130,8 @@
         </p:nvSpPr>
         <p:spPr>
           <a:xfrm>
-            <a:off x="4507992" y="5396484"/>
-            <a:ext cx="7013448" cy="620268"/>
+            <a:off x="4507992" y="5405628"/>
+            <a:ext cx="7013448" cy="592836"/>
           </a:xfrm>
           <a:prstGeom prst="rect">
             <a:avLst/>
@@ -5139,7 +5139,7 @@
           <a:noFill/>
         </p:spPr>
         <p:txBody>
-          <a:bodyPr wrap="square" lIns="18288" rIns="18288" tIns="13716" bIns="13716">
+          <a:bodyPr wrap="square" anchor="ctr" lIns="18288" rIns="18288" tIns="13716" bIns="13716">
             <a:noAutofit/>
           </a:bodyPr>
           <a:lstStyle/>
